--- a/containers/figures/problem-setup-2.pptx
+++ b/containers/figures/problem-setup-2.pptx
@@ -259,7 +259,7 @@
           <a:p>
             <a:fld id="{74386EFB-BF3A-E44F-8706-07EE3741FB69}" type="datetimeFigureOut">
               <a:rPr lang="en-US" smtClean="0"/>
-              <a:t>4/20/26</a:t>
+              <a:t>7/15/26</a:t>
             </a:fld>
             <a:endParaRPr lang="en-US"/>
           </a:p>
@@ -457,7 +457,7 @@
           <a:p>
             <a:fld id="{74386EFB-BF3A-E44F-8706-07EE3741FB69}" type="datetimeFigureOut">
               <a:rPr lang="en-US" smtClean="0"/>
-              <a:t>4/20/26</a:t>
+              <a:t>7/15/26</a:t>
             </a:fld>
             <a:endParaRPr lang="en-US"/>
           </a:p>
@@ -665,7 +665,7 @@
           <a:p>
             <a:fld id="{74386EFB-BF3A-E44F-8706-07EE3741FB69}" type="datetimeFigureOut">
               <a:rPr lang="en-US" smtClean="0"/>
-              <a:t>4/20/26</a:t>
+              <a:t>7/15/26</a:t>
             </a:fld>
             <a:endParaRPr lang="en-US"/>
           </a:p>
@@ -863,7 +863,7 @@
           <a:p>
             <a:fld id="{74386EFB-BF3A-E44F-8706-07EE3741FB69}" type="datetimeFigureOut">
               <a:rPr lang="en-US" smtClean="0"/>
-              <a:t>4/20/26</a:t>
+              <a:t>7/15/26</a:t>
             </a:fld>
             <a:endParaRPr lang="en-US"/>
           </a:p>
@@ -1138,7 +1138,7 @@
           <a:p>
             <a:fld id="{74386EFB-BF3A-E44F-8706-07EE3741FB69}" type="datetimeFigureOut">
               <a:rPr lang="en-US" smtClean="0"/>
-              <a:t>4/20/26</a:t>
+              <a:t>7/15/26</a:t>
             </a:fld>
             <a:endParaRPr lang="en-US"/>
           </a:p>
@@ -1403,7 +1403,7 @@
           <a:p>
             <a:fld id="{74386EFB-BF3A-E44F-8706-07EE3741FB69}" type="datetimeFigureOut">
               <a:rPr lang="en-US" smtClean="0"/>
-              <a:t>4/20/26</a:t>
+              <a:t>7/15/26</a:t>
             </a:fld>
             <a:endParaRPr lang="en-US"/>
           </a:p>
@@ -1815,7 +1815,7 @@
           <a:p>
             <a:fld id="{74386EFB-BF3A-E44F-8706-07EE3741FB69}" type="datetimeFigureOut">
               <a:rPr lang="en-US" smtClean="0"/>
-              <a:t>4/20/26</a:t>
+              <a:t>7/15/26</a:t>
             </a:fld>
             <a:endParaRPr lang="en-US"/>
           </a:p>
@@ -1956,7 +1956,7 @@
           <a:p>
             <a:fld id="{74386EFB-BF3A-E44F-8706-07EE3741FB69}" type="datetimeFigureOut">
               <a:rPr lang="en-US" smtClean="0"/>
-              <a:t>4/20/26</a:t>
+              <a:t>7/15/26</a:t>
             </a:fld>
             <a:endParaRPr lang="en-US"/>
           </a:p>
@@ -2069,7 +2069,7 @@
           <a:p>
             <a:fld id="{74386EFB-BF3A-E44F-8706-07EE3741FB69}" type="datetimeFigureOut">
               <a:rPr lang="en-US" smtClean="0"/>
-              <a:t>4/20/26</a:t>
+              <a:t>7/15/26</a:t>
             </a:fld>
             <a:endParaRPr lang="en-US"/>
           </a:p>
@@ -2380,7 +2380,7 @@
           <a:p>
             <a:fld id="{74386EFB-BF3A-E44F-8706-07EE3741FB69}" type="datetimeFigureOut">
               <a:rPr lang="en-US" smtClean="0"/>
-              <a:t>4/20/26</a:t>
+              <a:t>7/15/26</a:t>
             </a:fld>
             <a:endParaRPr lang="en-US"/>
           </a:p>
@@ -2668,7 +2668,7 @@
           <a:p>
             <a:fld id="{74386EFB-BF3A-E44F-8706-07EE3741FB69}" type="datetimeFigureOut">
               <a:rPr lang="en-US" smtClean="0"/>
-              <a:t>4/20/26</a:t>
+              <a:t>7/15/26</a:t>
             </a:fld>
             <a:endParaRPr lang="en-US"/>
           </a:p>
@@ -2909,7 +2909,7 @@
           <a:p>
             <a:fld id="{74386EFB-BF3A-E44F-8706-07EE3741FB69}" type="datetimeFigureOut">
               <a:rPr lang="en-US" smtClean="0"/>
-              <a:t>4/20/26</a:t>
+              <a:t>7/15/26</a:t>
             </a:fld>
             <a:endParaRPr lang="en-US"/>
           </a:p>
@@ -3749,7 +3749,7 @@
                   <a:schemeClr val="tx1"/>
                 </a:solidFill>
               </a:rPr>
-              <a:t>(modules, Ves)</a:t>
+              <a:t>(modules, VEs)</a:t>
             </a:r>
           </a:p>
         </p:txBody>
@@ -3808,8 +3808,8 @@
         </p:nvSpPr>
         <p:spPr>
           <a:xfrm>
-            <a:off x="7010401" y="1414360"/>
-            <a:ext cx="3820886" cy="3539430"/>
+            <a:off x="6588088" y="962668"/>
+            <a:ext cx="4504456" cy="4031873"/>
           </a:xfrm>
           <a:prstGeom prst="rect">
             <a:avLst/>
@@ -3827,7 +3827,7 @@
             </a:pPr>
             <a:r>
               <a:rPr lang="en-US" sz="1600" dirty="0"/>
-              <a:t>You build a contain with the codes (apps) and scripts, and environment needed to run the container.</a:t>
+              <a:t>You build a container with the codes (apps) and scripts, and environment needed to run the container.</a:t>
             </a:r>
           </a:p>
           <a:p>
@@ -3875,101 +3875,131 @@
               <a:t>Other’s OS need not be the same on which the container was built.</a:t>
             </a:r>
           </a:p>
-        </p:txBody>
-      </p:sp>
-      <p:sp>
-        <p:nvSpPr>
-          <p:cNvPr id="12" name="TextBox 11">
-            <a:extLst>
-              <a:ext uri="{FF2B5EF4-FFF2-40B4-BE49-F238E27FC236}">
-                <a16:creationId xmlns:a16="http://schemas.microsoft.com/office/drawing/2014/main" id="{7377D310-8C04-61B3-2CA0-48D33AF67DC5}"/>
-              </a:ext>
-            </a:extLst>
-          </p:cNvPr>
-          <p:cNvSpPr txBox="1"/>
+          <a:p>
+            <a:pPr marL="800100" lvl="1" indent="-342900">
+              <a:buAutoNum type="arabicPeriod"/>
+            </a:pPr>
+            <a:r>
+              <a:rPr lang="en-US" sz="1600" dirty="0"/>
+              <a:t>But if you are not using a Linux OS, then you have to do extra work (e.g., Windows, Mac). </a:t>
+            </a:r>
+          </a:p>
+        </p:txBody>
+      </p:sp>
+      <p:grpSp>
+        <p:nvGrpSpPr>
+          <p:cNvPr id="14" name="Group 13">
+            <a:extLst>
+              <a:ext uri="{FF2B5EF4-FFF2-40B4-BE49-F238E27FC236}">
+                <a16:creationId xmlns:a16="http://schemas.microsoft.com/office/drawing/2014/main" id="{96F52F39-7854-36A3-7472-A2C0059089C7}"/>
+              </a:ext>
+            </a:extLst>
+          </p:cNvPr>
+          <p:cNvGrpSpPr/>
           <p:nvPr/>
-        </p:nvSpPr>
-        <p:spPr>
+        </p:nvGrpSpPr>
+        <p:grpSpPr>
           <a:xfrm>
-            <a:off x="8308167" y="5475515"/>
-            <a:ext cx="1737527" cy="1200329"/>
+            <a:off x="7782375" y="5185106"/>
+            <a:ext cx="2079171" cy="1570758"/>
+            <a:chOff x="8137344" y="5105086"/>
+            <a:chExt cx="2079171" cy="1570758"/>
           </a:xfrm>
-          <a:prstGeom prst="rect">
-            <a:avLst/>
-          </a:prstGeom>
-          <a:noFill/>
-        </p:spPr>
-        <p:txBody>
-          <a:bodyPr wrap="none" rtlCol="0">
-            <a:spAutoFit/>
-          </a:bodyPr>
-          <a:lstStyle/>
-          <a:p>
-            <a:r>
-              <a:rPr lang="en-US" dirty="0"/>
-              <a:t>Portability</a:t>
-            </a:r>
-          </a:p>
-          <a:p>
-            <a:r>
-              <a:rPr lang="en-US" dirty="0"/>
-              <a:t>Customizability</a:t>
-            </a:r>
-          </a:p>
-          <a:p>
-            <a:r>
-              <a:rPr lang="en-US" dirty="0"/>
-              <a:t>Sameness</a:t>
-            </a:r>
-          </a:p>
-          <a:p>
-            <a:r>
-              <a:rPr lang="en-US" dirty="0"/>
-              <a:t>Permanence</a:t>
-            </a:r>
-          </a:p>
-        </p:txBody>
-      </p:sp>
-      <p:sp>
-        <p:nvSpPr>
-          <p:cNvPr id="13" name="TextBox 12">
-            <a:extLst>
-              <a:ext uri="{FF2B5EF4-FFF2-40B4-BE49-F238E27FC236}">
-                <a16:creationId xmlns:a16="http://schemas.microsoft.com/office/drawing/2014/main" id="{BC0FDE5B-CD1D-C2B4-4497-F0FC98C014CB}"/>
-              </a:ext>
-            </a:extLst>
-          </p:cNvPr>
-          <p:cNvSpPr txBox="1"/>
-          <p:nvPr/>
-        </p:nvSpPr>
-        <p:spPr>
-          <a:xfrm>
-            <a:off x="8137344" y="5105086"/>
-            <a:ext cx="2079171" cy="369332"/>
-          </a:xfrm>
-          <a:prstGeom prst="rect">
-            <a:avLst/>
-          </a:prstGeom>
-          <a:noFill/>
-        </p:spPr>
-        <p:txBody>
-          <a:bodyPr wrap="square" rtlCol="0">
-            <a:spAutoFit/>
-          </a:bodyPr>
-          <a:lstStyle/>
-          <a:p>
-            <a:pPr algn="ctr"/>
-            <a:r>
-              <a:rPr lang="en-US" dirty="0">
-                <a:solidFill>
-                  <a:srgbClr val="0432FF"/>
-                </a:solidFill>
-              </a:rPr>
-              <a:t>Realized Features</a:t>
-            </a:r>
-          </a:p>
-        </p:txBody>
-      </p:sp>
+        </p:grpSpPr>
+        <p:sp>
+          <p:nvSpPr>
+            <p:cNvPr id="12" name="TextBox 11">
+              <a:extLst>
+                <a:ext uri="{FF2B5EF4-FFF2-40B4-BE49-F238E27FC236}">
+                  <a16:creationId xmlns:a16="http://schemas.microsoft.com/office/drawing/2014/main" id="{7377D310-8C04-61B3-2CA0-48D33AF67DC5}"/>
+                </a:ext>
+              </a:extLst>
+            </p:cNvPr>
+            <p:cNvSpPr txBox="1"/>
+            <p:nvPr/>
+          </p:nvSpPr>
+          <p:spPr>
+            <a:xfrm>
+              <a:off x="8308167" y="5475515"/>
+              <a:ext cx="1737527" cy="1200329"/>
+            </a:xfrm>
+            <a:prstGeom prst="rect">
+              <a:avLst/>
+            </a:prstGeom>
+            <a:noFill/>
+          </p:spPr>
+          <p:txBody>
+            <a:bodyPr wrap="none" rtlCol="0">
+              <a:spAutoFit/>
+            </a:bodyPr>
+            <a:lstStyle/>
+            <a:p>
+              <a:r>
+                <a:rPr lang="en-US" dirty="0"/>
+                <a:t>Portability</a:t>
+              </a:r>
+            </a:p>
+            <a:p>
+              <a:r>
+                <a:rPr lang="en-US" dirty="0"/>
+                <a:t>Customizability</a:t>
+              </a:r>
+            </a:p>
+            <a:p>
+              <a:r>
+                <a:rPr lang="en-US" dirty="0"/>
+                <a:t>Sameness</a:t>
+              </a:r>
+            </a:p>
+            <a:p>
+              <a:r>
+                <a:rPr lang="en-US" dirty="0"/>
+                <a:t>Permanence</a:t>
+              </a:r>
+            </a:p>
+          </p:txBody>
+        </p:sp>
+        <p:sp>
+          <p:nvSpPr>
+            <p:cNvPr id="13" name="TextBox 12">
+              <a:extLst>
+                <a:ext uri="{FF2B5EF4-FFF2-40B4-BE49-F238E27FC236}">
+                  <a16:creationId xmlns:a16="http://schemas.microsoft.com/office/drawing/2014/main" id="{BC0FDE5B-CD1D-C2B4-4497-F0FC98C014CB}"/>
+                </a:ext>
+              </a:extLst>
+            </p:cNvPr>
+            <p:cNvSpPr txBox="1"/>
+            <p:nvPr/>
+          </p:nvSpPr>
+          <p:spPr>
+            <a:xfrm>
+              <a:off x="8137344" y="5105086"/>
+              <a:ext cx="2079171" cy="369332"/>
+            </a:xfrm>
+            <a:prstGeom prst="rect">
+              <a:avLst/>
+            </a:prstGeom>
+            <a:noFill/>
+          </p:spPr>
+          <p:txBody>
+            <a:bodyPr wrap="square" rtlCol="0">
+              <a:spAutoFit/>
+            </a:bodyPr>
+            <a:lstStyle/>
+            <a:p>
+              <a:pPr algn="ctr"/>
+              <a:r>
+                <a:rPr lang="en-US" dirty="0">
+                  <a:solidFill>
+                    <a:srgbClr val="0432FF"/>
+                  </a:solidFill>
+                </a:rPr>
+                <a:t>Realized Features</a:t>
+              </a:r>
+            </a:p>
+          </p:txBody>
+        </p:sp>
+      </p:grpSp>
     </p:spTree>
     <p:extLst>
       <p:ext uri="{BB962C8B-B14F-4D97-AF65-F5344CB8AC3E}">
